--- a/apps/resources/bundled_files/6-klass-jonokoy-kobeytuuchuler-sabak.pptx
+++ b/apps/resources/bundled_files/6-klass-jonokoy-kobeytuuchuler-sabak.pptx
@@ -5196,7 +5196,7 @@
                 </a:solidFill>
                 <a:latin typeface="PT Sans"/>
               </a:rPr>
-              <a:t>6-класс · Математика</a:t>
+              <a:t/>
             </a:r>
           </a:p>
         </p:txBody>
@@ -5688,7 +5688,7 @@
                 </a:solidFill>
                 <a:latin typeface="PT Sans"/>
               </a:rPr>
-              <a:t>6-класс ›</a:t>
+              <a:t/>
             </a:r>
           </a:p>
           <a:p>
@@ -6605,7 +6605,7 @@
                 </a:solidFill>
                 <a:latin typeface="PT Sans"/>
               </a:rPr>
-              <a:t>6-класс ›</a:t>
+              <a:t/>
             </a:r>
           </a:p>
           <a:p>
@@ -11100,7 +11100,7 @@
                 </a:solidFill>
                 <a:latin typeface="PT Sans"/>
               </a:rPr>
-              <a:t>6-класс ›</a:t>
+              <a:t/>
             </a:r>
           </a:p>
           <a:p>
@@ -13445,7 +13445,7 @@
                 </a:solidFill>
                 <a:latin typeface="PT Sans"/>
               </a:rPr>
-              <a:t>6-класс ›</a:t>
+              <a:t/>
             </a:r>
           </a:p>
           <a:p>
@@ -14775,7 +14775,7 @@
                 </a:solidFill>
                 <a:latin typeface="PT Sans"/>
               </a:rPr>
-              <a:t>6-класс ›</a:t>
+              <a:t/>
             </a:r>
           </a:p>
           <a:p>
@@ -15448,7 +15448,7 @@
                 </a:solidFill>
                 <a:latin typeface="PT Sans"/>
               </a:rPr>
-              <a:t>6-класс ›</a:t>
+              <a:t/>
             </a:r>
           </a:p>
           <a:p>
@@ -16082,7 +16082,7 @@
                 </a:solidFill>
                 <a:latin typeface="PT Sans"/>
               </a:rPr>
-              <a:t>6-класс ›</a:t>
+              <a:t/>
             </a:r>
           </a:p>
           <a:p>
@@ -17631,7 +17631,7 @@
                 </a:solidFill>
                 <a:latin typeface="PT Sans"/>
               </a:rPr>
-              <a:t>6-класс ›</a:t>
+              <a:t/>
             </a:r>
           </a:p>
           <a:p>
@@ -18715,7 +18715,7 @@
                 </a:solidFill>
                 <a:latin typeface="PT Sans"/>
               </a:rPr>
-              <a:t>6-класс ›</a:t>
+              <a:t/>
             </a:r>
           </a:p>
           <a:p>
@@ -20245,7 +20245,7 @@
                 </a:solidFill>
                 <a:latin typeface="PT Sans"/>
               </a:rPr>
-              <a:t>6-класс ›</a:t>
+              <a:t/>
             </a:r>
           </a:p>
           <a:p>
@@ -22759,7 +22759,7 @@
                 </a:solidFill>
                 <a:latin typeface="PT Sans"/>
               </a:rPr>
-              <a:t>6-класс ›</a:t>
+              <a:t/>
             </a:r>
           </a:p>
           <a:p>
@@ -24036,7 +24036,7 @@
                 </a:solidFill>
                 <a:latin typeface="PT Sans"/>
               </a:rPr>
-              <a:t>6-класс ›</a:t>
+              <a:t/>
             </a:r>
           </a:p>
           <a:p>
@@ -25464,7 +25464,7 @@
                 </a:solidFill>
                 <a:latin typeface="PT Sans"/>
               </a:rPr>
-              <a:t>6-класс ›</a:t>
+              <a:t/>
             </a:r>
           </a:p>
           <a:p>
@@ -26920,7 +26920,7 @@
                 </a:solidFill>
                 <a:latin typeface="PT Sans"/>
               </a:rPr>
-              <a:t>6-класс ›</a:t>
+              <a:t/>
             </a:r>
           </a:p>
           <a:p>
@@ -29016,7 +29016,7 @@
                 </a:solidFill>
                 <a:latin typeface="PT Sans"/>
               </a:rPr>
-              <a:t>6-класс ›</a:t>
+              <a:t/>
             </a:r>
           </a:p>
           <a:p>
@@ -29816,7 +29816,7 @@
                 </a:solidFill>
                 <a:latin typeface="PT Sans"/>
               </a:rPr>
-              <a:t>6-класс ›</a:t>
+              <a:t/>
             </a:r>
           </a:p>
           <a:p>
@@ -30657,7 +30657,7 @@
                 </a:solidFill>
                 <a:latin typeface="PT Sans"/>
               </a:rPr>
-              <a:t>6-класс ›</a:t>
+              <a:t/>
             </a:r>
           </a:p>
           <a:p>
@@ -31606,7 +31606,7 @@
                 </a:solidFill>
                 <a:latin typeface="PT Sans"/>
               </a:rPr>
-              <a:t>6-класс ›</a:t>
+              <a:t/>
             </a:r>
           </a:p>
           <a:p>
@@ -33060,7 +33060,7 @@
                 </a:solidFill>
                 <a:latin typeface="PT Sans"/>
               </a:rPr>
-              <a:t>6-класс ›</a:t>
+              <a:t/>
             </a:r>
           </a:p>
           <a:p>
@@ -33806,7 +33806,7 @@
                 </a:solidFill>
                 <a:latin typeface="PT Sans"/>
               </a:rPr>
-              <a:t>6-класс ›</a:t>
+              <a:t/>
             </a:r>
           </a:p>
           <a:p>
@@ -34614,7 +34614,7 @@
                 </a:solidFill>
                 <a:latin typeface="PT Sans"/>
               </a:rPr>
-              <a:t>6-класс ›</a:t>
+              <a:t/>
             </a:r>
           </a:p>
           <a:p>
@@ -35805,7 +35805,7 @@
                 </a:solidFill>
                 <a:latin typeface="PT Sans"/>
               </a:rPr>
-              <a:t>6-класс ›</a:t>
+              <a:t/>
             </a:r>
           </a:p>
           <a:p>
@@ -37000,7 +37000,7 @@
                 </a:solidFill>
                 <a:latin typeface="PT Sans"/>
               </a:rPr>
-              <a:t>6-класс ›</a:t>
+              <a:t/>
             </a:r>
           </a:p>
           <a:p>
@@ -37181,7 +37181,7 @@
                 </a:solidFill>
                 <a:latin typeface="PT Sans"/>
               </a:rPr>
-              <a:t>5-класс</a:t>
+              <a:t/>
             </a:r>
           </a:p>
         </p:txBody>
@@ -38178,7 +38178,7 @@
                 </a:solidFill>
                 <a:latin typeface="PT Sans"/>
               </a:rPr>
-              <a:t>6-класс ›</a:t>
+              <a:t/>
             </a:r>
           </a:p>
           <a:p>
@@ -39326,7 +39326,7 @@
                 </a:solidFill>
                 <a:latin typeface="PT Sans"/>
               </a:rPr>
-              <a:t>6-класс ›</a:t>
+              <a:t/>
             </a:r>
           </a:p>
           <a:p>

--- a/apps/resources/bundled_files/6-klass-jonokoy-kobeytuuchuler-sabak.pptx
+++ b/apps/resources/bundled_files/6-klass-jonokoy-kobeytuuchuler-sabak.pptx
@@ -1582,7 +1582,7 @@
           <a:lstStyle/>
           <a:p>
             <a:r>
-              <a:t>Ой жүгүртүү маданияты (Wenxi Lee, 2.6).</a:t>
+              <a:t>Ой жүгүртүү маданияты (Wenxi Lee, 2,6).</a:t>
             </a:r>
           </a:p>
         </p:txBody>
